--- a/Fall 2026/Week 1 -- Introduction, Genome Data and NCBI, Coverage.pptx
+++ b/Fall 2026/Week 1 -- Introduction, Genome Data and NCBI, Coverage.pptx
@@ -5,7 +5,7 @@
     <p:sldMasterId id="2147483648" r:id="rId1"/>
   </p:sldMasterIdLst>
   <p:notesMasterIdLst>
-    <p:notesMasterId r:id="rId65"/>
+    <p:notesMasterId r:id="rId66"/>
   </p:notesMasterIdLst>
   <p:sldIdLst>
     <p:sldId id="272" r:id="rId2"/>
@@ -43,34 +43,35 @@
     <p:sldId id="475" r:id="rId34"/>
     <p:sldId id="463" r:id="rId35"/>
     <p:sldId id="473" r:id="rId36"/>
-    <p:sldId id="486" r:id="rId37"/>
-    <p:sldId id="464" r:id="rId38"/>
-    <p:sldId id="258" r:id="rId39"/>
-    <p:sldId id="261" r:id="rId40"/>
-    <p:sldId id="285" r:id="rId41"/>
-    <p:sldId id="262" r:id="rId42"/>
-    <p:sldId id="465" r:id="rId43"/>
-    <p:sldId id="466" r:id="rId44"/>
-    <p:sldId id="286" r:id="rId45"/>
-    <p:sldId id="265" r:id="rId46"/>
-    <p:sldId id="287" r:id="rId47"/>
-    <p:sldId id="288" r:id="rId48"/>
-    <p:sldId id="289" r:id="rId49"/>
-    <p:sldId id="260" r:id="rId50"/>
-    <p:sldId id="270" r:id="rId51"/>
-    <p:sldId id="271" r:id="rId52"/>
-    <p:sldId id="273" r:id="rId53"/>
-    <p:sldId id="290" r:id="rId54"/>
-    <p:sldId id="487" r:id="rId55"/>
-    <p:sldId id="468" r:id="rId56"/>
-    <p:sldId id="490" r:id="rId57"/>
-    <p:sldId id="491" r:id="rId58"/>
-    <p:sldId id="492" r:id="rId59"/>
-    <p:sldId id="493" r:id="rId60"/>
-    <p:sldId id="494" r:id="rId61"/>
-    <p:sldId id="495" r:id="rId62"/>
-    <p:sldId id="496" r:id="rId63"/>
-    <p:sldId id="497" r:id="rId64"/>
+    <p:sldId id="264" r:id="rId37"/>
+    <p:sldId id="486" r:id="rId38"/>
+    <p:sldId id="464" r:id="rId39"/>
+    <p:sldId id="258" r:id="rId40"/>
+    <p:sldId id="261" r:id="rId41"/>
+    <p:sldId id="285" r:id="rId42"/>
+    <p:sldId id="262" r:id="rId43"/>
+    <p:sldId id="465" r:id="rId44"/>
+    <p:sldId id="466" r:id="rId45"/>
+    <p:sldId id="286" r:id="rId46"/>
+    <p:sldId id="265" r:id="rId47"/>
+    <p:sldId id="287" r:id="rId48"/>
+    <p:sldId id="288" r:id="rId49"/>
+    <p:sldId id="289" r:id="rId50"/>
+    <p:sldId id="260" r:id="rId51"/>
+    <p:sldId id="270" r:id="rId52"/>
+    <p:sldId id="271" r:id="rId53"/>
+    <p:sldId id="273" r:id="rId54"/>
+    <p:sldId id="290" r:id="rId55"/>
+    <p:sldId id="487" r:id="rId56"/>
+    <p:sldId id="468" r:id="rId57"/>
+    <p:sldId id="490" r:id="rId58"/>
+    <p:sldId id="491" r:id="rId59"/>
+    <p:sldId id="492" r:id="rId60"/>
+    <p:sldId id="493" r:id="rId61"/>
+    <p:sldId id="494" r:id="rId62"/>
+    <p:sldId id="495" r:id="rId63"/>
+    <p:sldId id="496" r:id="rId64"/>
+    <p:sldId id="497" r:id="rId65"/>
   </p:sldIdLst>
   <p:sldSz cx="12192000" cy="6858000"/>
   <p:notesSz cx="6858000" cy="9144000"/>
@@ -23866,6 +23867,168 @@
 </file>
 
 <file path=ppt/slides/slide36.xml><?xml version="1.0" encoding="utf-8"?>
+<p:sld xmlns:a="http://schemas.openxmlformats.org/drawingml/2006/main" xmlns:r="http://schemas.openxmlformats.org/officeDocument/2006/relationships" xmlns:p="http://schemas.openxmlformats.org/presentationml/2006/main" show="0">
+  <p:cSld>
+    <p:spTree>
+      <p:nvGrpSpPr>
+        <p:cNvPr id="1" name=""/>
+        <p:cNvGrpSpPr/>
+        <p:nvPr/>
+      </p:nvGrpSpPr>
+      <p:grpSpPr>
+        <a:xfrm>
+          <a:off x="0" y="0"/>
+          <a:ext cx="0" cy="0"/>
+          <a:chOff x="0" y="0"/>
+          <a:chExt cx="0" cy="0"/>
+        </a:xfrm>
+      </p:grpSpPr>
+      <p:sp>
+        <p:nvSpPr>
+          <p:cNvPr id="2" name="Title 1">
+            <a:extLst>
+              <a:ext uri="{FF2B5EF4-FFF2-40B4-BE49-F238E27FC236}">
+                <a16:creationId xmlns:a16="http://schemas.microsoft.com/office/drawing/2014/main" id="{6AFB930E-0559-0DA2-C7D6-9FA3A1A5FF80}"/>
+              </a:ext>
+            </a:extLst>
+          </p:cNvPr>
+          <p:cNvSpPr>
+            <a:spLocks noGrp="1"/>
+          </p:cNvSpPr>
+          <p:nvPr>
+            <p:ph type="title"/>
+          </p:nvPr>
+        </p:nvSpPr>
+        <p:spPr/>
+        <p:txBody>
+          <a:bodyPr>
+            <a:normAutofit fontScale="90000"/>
+          </a:bodyPr>
+          <a:lstStyle/>
+          <a:p>
+            <a:r>
+              <a:rPr lang="en-US" dirty="0"/>
+              <a:t>SAM format</a:t>
+            </a:r>
+          </a:p>
+        </p:txBody>
+      </p:sp>
+      <p:sp>
+        <p:nvSpPr>
+          <p:cNvPr id="6" name="Content Placeholder 5">
+            <a:extLst>
+              <a:ext uri="{FF2B5EF4-FFF2-40B4-BE49-F238E27FC236}">
+                <a16:creationId xmlns:a16="http://schemas.microsoft.com/office/drawing/2014/main" id="{DBC9582D-B5FB-116C-8289-AB6D4D6EEE06}"/>
+              </a:ext>
+            </a:extLst>
+          </p:cNvPr>
+          <p:cNvSpPr>
+            <a:spLocks noGrp="1"/>
+          </p:cNvSpPr>
+          <p:nvPr>
+            <p:ph idx="1"/>
+          </p:nvPr>
+        </p:nvSpPr>
+        <p:spPr>
+          <a:xfrm>
+            <a:off x="830826" y="1749245"/>
+            <a:ext cx="9075425" cy="1198665"/>
+          </a:xfrm>
+        </p:spPr>
+        <p:txBody>
+          <a:bodyPr>
+            <a:normAutofit fontScale="77500" lnSpcReduction="20000"/>
+          </a:bodyPr>
+          <a:lstStyle/>
+          <a:p>
+            <a:r>
+              <a:rPr lang="en-US" dirty="0"/>
+              <a:t>FLAG field – 11 bits represented as decimal number</a:t>
+            </a:r>
+          </a:p>
+          <a:p>
+            <a:pPr lvl="1"/>
+            <a:r>
+              <a:rPr lang="en-US" dirty="0"/>
+              <a:t>Most often used are 0 and 16</a:t>
+            </a:r>
+          </a:p>
+          <a:p>
+            <a:pPr lvl="1"/>
+            <a:r>
+              <a:rPr lang="en-US" dirty="0"/>
+              <a:t>Conversion 000000010000</a:t>
+            </a:r>
+            <a:r>
+              <a:rPr lang="en-US" baseline="-25000" dirty="0"/>
+              <a:t>2</a:t>
+            </a:r>
+            <a:r>
+              <a:rPr lang="en-US" dirty="0"/>
+              <a:t> = 16, 010000010101</a:t>
+            </a:r>
+            <a:r>
+              <a:rPr lang="en-US" baseline="-25000" dirty="0"/>
+              <a:t>2</a:t>
+            </a:r>
+            <a:r>
+              <a:rPr lang="en-US" dirty="0"/>
+              <a:t> = 1024+16+4+1=1045</a:t>
+            </a:r>
+          </a:p>
+          <a:p>
+            <a:pPr lvl="1"/>
+            <a:endParaRPr lang="en-US" dirty="0"/>
+          </a:p>
+          <a:p>
+            <a:endParaRPr lang="en-US" dirty="0"/>
+          </a:p>
+        </p:txBody>
+      </p:sp>
+      <p:pic>
+        <p:nvPicPr>
+          <p:cNvPr id="4" name="Picture 3">
+            <a:extLst>
+              <a:ext uri="{FF2B5EF4-FFF2-40B4-BE49-F238E27FC236}">
+                <a16:creationId xmlns:a16="http://schemas.microsoft.com/office/drawing/2014/main" id="{ABA5D542-7332-9542-95D9-9365FDB5444C}"/>
+              </a:ext>
+            </a:extLst>
+          </p:cNvPr>
+          <p:cNvPicPr>
+            <a:picLocks noChangeAspect="1"/>
+          </p:cNvPicPr>
+          <p:nvPr/>
+        </p:nvPicPr>
+        <p:blipFill>
+          <a:blip r:embed="rId2"/>
+          <a:stretch>
+            <a:fillRect/>
+          </a:stretch>
+        </p:blipFill>
+        <p:spPr>
+          <a:xfrm>
+            <a:off x="838200" y="2792373"/>
+            <a:ext cx="9669224" cy="3991532"/>
+          </a:xfrm>
+          <a:prstGeom prst="rect">
+            <a:avLst/>
+          </a:prstGeom>
+        </p:spPr>
+      </p:pic>
+    </p:spTree>
+    <p:extLst>
+      <p:ext uri="{BB962C8B-B14F-4D97-AF65-F5344CB8AC3E}">
+        <p14:creationId xmlns:p14="http://schemas.microsoft.com/office/powerpoint/2010/main" val="376118783"/>
+      </p:ext>
+    </p:extLst>
+  </p:cSld>
+  <p:clrMapOvr>
+    <a:masterClrMapping/>
+  </p:clrMapOvr>
+</p:sld>
+</file>
+
+<file path=ppt/slides/slide37.xml><?xml version="1.0" encoding="utf-8"?>
 <p:sld xmlns:a="http://schemas.openxmlformats.org/drawingml/2006/main" xmlns:r="http://schemas.openxmlformats.org/officeDocument/2006/relationships" xmlns:p="http://schemas.openxmlformats.org/presentationml/2006/main">
   <p:cSld>
     <p:spTree>
@@ -24074,7 +24237,7 @@
 </p:sld>
 </file>
 
-<file path=ppt/slides/slide37.xml><?xml version="1.0" encoding="utf-8"?>
+<file path=ppt/slides/slide38.xml><?xml version="1.0" encoding="utf-8"?>
 <p:sld xmlns:a="http://schemas.openxmlformats.org/drawingml/2006/main" xmlns:r="http://schemas.openxmlformats.org/officeDocument/2006/relationships" xmlns:p="http://schemas.openxmlformats.org/presentationml/2006/main">
   <p:cSld>
     <p:spTree>
@@ -24256,7 +24419,7 @@
 </p:sld>
 </file>
 
-<file path=ppt/slides/slide38.xml><?xml version="1.0" encoding="utf-8"?>
+<file path=ppt/slides/slide39.xml><?xml version="1.0" encoding="utf-8"?>
 <p:sld xmlns:a="http://schemas.openxmlformats.org/drawingml/2006/main" xmlns:r="http://schemas.openxmlformats.org/officeDocument/2006/relationships" xmlns:p="http://schemas.openxmlformats.org/presentationml/2006/main">
   <p:cSld>
     <p:spTree>
@@ -24346,7 +24509,157 @@
 </p:sld>
 </file>
 
-<file path=ppt/slides/slide39.xml><?xml version="1.0" encoding="utf-8"?>
+<file path=ppt/slides/slide4.xml><?xml version="1.0" encoding="utf-8"?>
+<p:sld xmlns:a="http://schemas.openxmlformats.org/drawingml/2006/main" xmlns:r="http://schemas.openxmlformats.org/officeDocument/2006/relationships" xmlns:p="http://schemas.openxmlformats.org/presentationml/2006/main">
+  <p:cSld>
+    <p:spTree>
+      <p:nvGrpSpPr>
+        <p:cNvPr id="1" name=""/>
+        <p:cNvGrpSpPr/>
+        <p:nvPr/>
+      </p:nvGrpSpPr>
+      <p:grpSpPr>
+        <a:xfrm>
+          <a:off x="0" y="0"/>
+          <a:ext cx="0" cy="0"/>
+          <a:chOff x="0" y="0"/>
+          <a:chExt cx="0" cy="0"/>
+        </a:xfrm>
+      </p:grpSpPr>
+      <p:sp>
+        <p:nvSpPr>
+          <p:cNvPr id="2" name="Title 1">
+            <a:extLst>
+              <a:ext uri="{FF2B5EF4-FFF2-40B4-BE49-F238E27FC236}">
+                <a16:creationId xmlns:a16="http://schemas.microsoft.com/office/drawing/2014/main" id="{2C9813C6-CF5E-F19A-1911-C0248DCADEF8}"/>
+              </a:ext>
+            </a:extLst>
+          </p:cNvPr>
+          <p:cNvSpPr>
+            <a:spLocks noGrp="1"/>
+          </p:cNvSpPr>
+          <p:nvPr>
+            <p:ph type="title"/>
+          </p:nvPr>
+        </p:nvSpPr>
+        <p:spPr/>
+        <p:txBody>
+          <a:bodyPr>
+            <a:normAutofit fontScale="90000"/>
+          </a:bodyPr>
+          <a:lstStyle/>
+          <a:p>
+            <a:r>
+              <a:rPr lang="en-US" dirty="0"/>
+              <a:t>More on the grades</a:t>
+            </a:r>
+          </a:p>
+        </p:txBody>
+      </p:sp>
+      <p:sp>
+        <p:nvSpPr>
+          <p:cNvPr id="3" name="Content Placeholder 2">
+            <a:extLst>
+              <a:ext uri="{FF2B5EF4-FFF2-40B4-BE49-F238E27FC236}">
+                <a16:creationId xmlns:a16="http://schemas.microsoft.com/office/drawing/2014/main" id="{19EF5C3B-90EF-64E1-09AF-4D77CB47BE41}"/>
+              </a:ext>
+            </a:extLst>
+          </p:cNvPr>
+          <p:cNvSpPr>
+            <a:spLocks noGrp="1"/>
+          </p:cNvSpPr>
+          <p:nvPr>
+            <p:ph idx="1"/>
+          </p:nvPr>
+        </p:nvSpPr>
+        <p:spPr>
+          <a:xfrm>
+            <a:off x="598620" y="1596539"/>
+            <a:ext cx="10972800" cy="5039265"/>
+          </a:xfrm>
+        </p:spPr>
+        <p:txBody>
+          <a:bodyPr>
+            <a:normAutofit/>
+          </a:bodyPr>
+          <a:lstStyle/>
+          <a:p>
+            <a:r>
+              <a:rPr lang="en-US" dirty="0"/>
+              <a:t>Lab assignments will include writing a code to accomplish certain task and may include additional task to plot outputs (depending on the assignment)</a:t>
+            </a:r>
+          </a:p>
+          <a:p>
+            <a:r>
+              <a:rPr lang="en-US" dirty="0"/>
+              <a:t>You can write code in python,  all code submissions will be handled and graded by </a:t>
+            </a:r>
+            <a:r>
+              <a:rPr lang="en-US" dirty="0" err="1"/>
+              <a:t>GradeScope</a:t>
+            </a:r>
+            <a:endParaRPr lang="en-US" dirty="0"/>
+          </a:p>
+          <a:p>
+            <a:r>
+              <a:rPr lang="en-US" dirty="0"/>
+              <a:t>You can ask AI (e.g. ChatGPT, Claude or MS Copilot) to help you with writing the code, however, the you must understand that an AI will always provide very similar code when prompted. If several students submit very similar code, this will be flagged in </a:t>
+            </a:r>
+            <a:r>
+              <a:rPr lang="en-US" dirty="0" err="1"/>
+              <a:t>GradeScope</a:t>
+            </a:r>
+            <a:r>
+              <a:rPr lang="en-US" dirty="0"/>
+              <a:t>, and may become grounds for investigation for cheating</a:t>
+            </a:r>
+          </a:p>
+        </p:txBody>
+      </p:sp>
+      <p:sp>
+        <p:nvSpPr>
+          <p:cNvPr id="4" name="Slide Number Placeholder 3">
+            <a:extLst>
+              <a:ext uri="{FF2B5EF4-FFF2-40B4-BE49-F238E27FC236}">
+                <a16:creationId xmlns:a16="http://schemas.microsoft.com/office/drawing/2014/main" id="{83A99E4E-B0AA-3BAF-4E55-D4E09E795A22}"/>
+              </a:ext>
+            </a:extLst>
+          </p:cNvPr>
+          <p:cNvSpPr>
+            <a:spLocks noGrp="1"/>
+          </p:cNvSpPr>
+          <p:nvPr>
+            <p:ph type="sldNum" sz="quarter" idx="12"/>
+          </p:nvPr>
+        </p:nvSpPr>
+        <p:spPr/>
+        <p:txBody>
+          <a:bodyPr/>
+          <a:lstStyle/>
+          <a:p>
+            <a:fld id="{B82CCC60-E8CD-4174-8B1A-7DF615B22EEF}" type="slidenum">
+              <a:rPr lang="en-US" smtClean="0"/>
+              <a:pPr/>
+              <a:t>4</a:t>
+            </a:fld>
+            <a:endParaRPr lang="en-US"/>
+          </a:p>
+        </p:txBody>
+      </p:sp>
+    </p:spTree>
+    <p:extLst>
+      <p:ext uri="{BB962C8B-B14F-4D97-AF65-F5344CB8AC3E}">
+        <p14:creationId xmlns:p14="http://schemas.microsoft.com/office/powerpoint/2010/main" val="3655342026"/>
+      </p:ext>
+    </p:extLst>
+  </p:cSld>
+  <p:clrMapOvr>
+    <a:masterClrMapping/>
+  </p:clrMapOvr>
+</p:sld>
+</file>
+
+<file path=ppt/slides/slide40.xml><?xml version="1.0" encoding="utf-8"?>
 <p:sld xmlns:a="http://schemas.openxmlformats.org/drawingml/2006/main" xmlns:r="http://schemas.openxmlformats.org/officeDocument/2006/relationships" xmlns:p="http://schemas.openxmlformats.org/presentationml/2006/main">
   <p:cSld>
     <p:spTree>
@@ -24445,157 +24758,7 @@
 </p:sld>
 </file>
 
-<file path=ppt/slides/slide4.xml><?xml version="1.0" encoding="utf-8"?>
-<p:sld xmlns:a="http://schemas.openxmlformats.org/drawingml/2006/main" xmlns:r="http://schemas.openxmlformats.org/officeDocument/2006/relationships" xmlns:p="http://schemas.openxmlformats.org/presentationml/2006/main">
-  <p:cSld>
-    <p:spTree>
-      <p:nvGrpSpPr>
-        <p:cNvPr id="1" name=""/>
-        <p:cNvGrpSpPr/>
-        <p:nvPr/>
-      </p:nvGrpSpPr>
-      <p:grpSpPr>
-        <a:xfrm>
-          <a:off x="0" y="0"/>
-          <a:ext cx="0" cy="0"/>
-          <a:chOff x="0" y="0"/>
-          <a:chExt cx="0" cy="0"/>
-        </a:xfrm>
-      </p:grpSpPr>
-      <p:sp>
-        <p:nvSpPr>
-          <p:cNvPr id="2" name="Title 1">
-            <a:extLst>
-              <a:ext uri="{FF2B5EF4-FFF2-40B4-BE49-F238E27FC236}">
-                <a16:creationId xmlns:a16="http://schemas.microsoft.com/office/drawing/2014/main" id="{2C9813C6-CF5E-F19A-1911-C0248DCADEF8}"/>
-              </a:ext>
-            </a:extLst>
-          </p:cNvPr>
-          <p:cNvSpPr>
-            <a:spLocks noGrp="1"/>
-          </p:cNvSpPr>
-          <p:nvPr>
-            <p:ph type="title"/>
-          </p:nvPr>
-        </p:nvSpPr>
-        <p:spPr/>
-        <p:txBody>
-          <a:bodyPr>
-            <a:normAutofit fontScale="90000"/>
-          </a:bodyPr>
-          <a:lstStyle/>
-          <a:p>
-            <a:r>
-              <a:rPr lang="en-US" dirty="0"/>
-              <a:t>More on the grades</a:t>
-            </a:r>
-          </a:p>
-        </p:txBody>
-      </p:sp>
-      <p:sp>
-        <p:nvSpPr>
-          <p:cNvPr id="3" name="Content Placeholder 2">
-            <a:extLst>
-              <a:ext uri="{FF2B5EF4-FFF2-40B4-BE49-F238E27FC236}">
-                <a16:creationId xmlns:a16="http://schemas.microsoft.com/office/drawing/2014/main" id="{19EF5C3B-90EF-64E1-09AF-4D77CB47BE41}"/>
-              </a:ext>
-            </a:extLst>
-          </p:cNvPr>
-          <p:cNvSpPr>
-            <a:spLocks noGrp="1"/>
-          </p:cNvSpPr>
-          <p:nvPr>
-            <p:ph idx="1"/>
-          </p:nvPr>
-        </p:nvSpPr>
-        <p:spPr>
-          <a:xfrm>
-            <a:off x="598620" y="1596539"/>
-            <a:ext cx="10972800" cy="5039265"/>
-          </a:xfrm>
-        </p:spPr>
-        <p:txBody>
-          <a:bodyPr>
-            <a:normAutofit/>
-          </a:bodyPr>
-          <a:lstStyle/>
-          <a:p>
-            <a:r>
-              <a:rPr lang="en-US" dirty="0"/>
-              <a:t>Lab assignments will include writing a code to accomplish certain task and may include additional task to plot outputs (depending on the assignment)</a:t>
-            </a:r>
-          </a:p>
-          <a:p>
-            <a:r>
-              <a:rPr lang="en-US" dirty="0"/>
-              <a:t>You can write code in python,  all code submissions will be handled and graded by </a:t>
-            </a:r>
-            <a:r>
-              <a:rPr lang="en-US" dirty="0" err="1"/>
-              <a:t>GradeScope</a:t>
-            </a:r>
-            <a:endParaRPr lang="en-US" dirty="0"/>
-          </a:p>
-          <a:p>
-            <a:r>
-              <a:rPr lang="en-US" dirty="0"/>
-              <a:t>You can ask AI (e.g. ChatGPT, Claude or MS Copilot) to help you with writing the code, however, the you must understand that an AI will always provide very similar code when prompted. If several students submit very similar code, this will be flagged in </a:t>
-            </a:r>
-            <a:r>
-              <a:rPr lang="en-US" dirty="0" err="1"/>
-              <a:t>GradeScope</a:t>
-            </a:r>
-            <a:r>
-              <a:rPr lang="en-US" dirty="0"/>
-              <a:t>, and may become grounds for investigation for cheating</a:t>
-            </a:r>
-          </a:p>
-        </p:txBody>
-      </p:sp>
-      <p:sp>
-        <p:nvSpPr>
-          <p:cNvPr id="4" name="Slide Number Placeholder 3">
-            <a:extLst>
-              <a:ext uri="{FF2B5EF4-FFF2-40B4-BE49-F238E27FC236}">
-                <a16:creationId xmlns:a16="http://schemas.microsoft.com/office/drawing/2014/main" id="{83A99E4E-B0AA-3BAF-4E55-D4E09E795A22}"/>
-              </a:ext>
-            </a:extLst>
-          </p:cNvPr>
-          <p:cNvSpPr>
-            <a:spLocks noGrp="1"/>
-          </p:cNvSpPr>
-          <p:nvPr>
-            <p:ph type="sldNum" sz="quarter" idx="12"/>
-          </p:nvPr>
-        </p:nvSpPr>
-        <p:spPr/>
-        <p:txBody>
-          <a:bodyPr/>
-          <a:lstStyle/>
-          <a:p>
-            <a:fld id="{B82CCC60-E8CD-4174-8B1A-7DF615B22EEF}" type="slidenum">
-              <a:rPr lang="en-US" smtClean="0"/>
-              <a:pPr/>
-              <a:t>4</a:t>
-            </a:fld>
-            <a:endParaRPr lang="en-US"/>
-          </a:p>
-        </p:txBody>
-      </p:sp>
-    </p:spTree>
-    <p:extLst>
-      <p:ext uri="{BB962C8B-B14F-4D97-AF65-F5344CB8AC3E}">
-        <p14:creationId xmlns:p14="http://schemas.microsoft.com/office/powerpoint/2010/main" val="3655342026"/>
-      </p:ext>
-    </p:extLst>
-  </p:cSld>
-  <p:clrMapOvr>
-    <a:masterClrMapping/>
-  </p:clrMapOvr>
-</p:sld>
-</file>
-
-<file path=ppt/slides/slide40.xml><?xml version="1.0" encoding="utf-8"?>
+<file path=ppt/slides/slide41.xml><?xml version="1.0" encoding="utf-8"?>
 <p:sld xmlns:a="http://schemas.openxmlformats.org/drawingml/2006/main" xmlns:r="http://schemas.openxmlformats.org/officeDocument/2006/relationships" xmlns:p="http://schemas.openxmlformats.org/presentationml/2006/main">
   <p:cSld>
     <p:spTree>
@@ -24746,7 +24909,7 @@
 </p:sld>
 </file>
 
-<file path=ppt/slides/slide41.xml><?xml version="1.0" encoding="utf-8"?>
+<file path=ppt/slides/slide42.xml><?xml version="1.0" encoding="utf-8"?>
 <p:sld xmlns:a="http://schemas.openxmlformats.org/drawingml/2006/main" xmlns:r="http://schemas.openxmlformats.org/officeDocument/2006/relationships" xmlns:p="http://schemas.openxmlformats.org/presentationml/2006/main">
   <p:cSld>
     <p:spTree>
@@ -24905,7 +25068,7 @@
 </p:sld>
 </file>
 
-<file path=ppt/slides/slide42.xml><?xml version="1.0" encoding="utf-8"?>
+<file path=ppt/slides/slide43.xml><?xml version="1.0" encoding="utf-8"?>
 <p:sld xmlns:a="http://schemas.openxmlformats.org/drawingml/2006/main" xmlns:r="http://schemas.openxmlformats.org/officeDocument/2006/relationships" xmlns:p="http://schemas.openxmlformats.org/presentationml/2006/main">
   <p:cSld>
     <p:spTree>
@@ -25064,7 +25227,7 @@
 </p:sld>
 </file>
 
-<file path=ppt/slides/slide43.xml><?xml version="1.0" encoding="utf-8"?>
+<file path=ppt/slides/slide44.xml><?xml version="1.0" encoding="utf-8"?>
 <p:sld xmlns:a="http://schemas.openxmlformats.org/drawingml/2006/main" xmlns:r="http://schemas.openxmlformats.org/officeDocument/2006/relationships" xmlns:p="http://schemas.openxmlformats.org/presentationml/2006/main">
   <p:cSld>
     <p:spTree>
@@ -25238,7 +25401,7 @@
 </p:sld>
 </file>
 
-<file path=ppt/slides/slide44.xml><?xml version="1.0" encoding="utf-8"?>
+<file path=ppt/slides/slide45.xml><?xml version="1.0" encoding="utf-8"?>
 <p:sld xmlns:a="http://schemas.openxmlformats.org/drawingml/2006/main" xmlns:r="http://schemas.openxmlformats.org/officeDocument/2006/relationships" xmlns:p="http://schemas.openxmlformats.org/presentationml/2006/main">
   <p:cSld>
     <p:spTree>
@@ -25397,7 +25560,7 @@
 </p:sld>
 </file>
 
-<file path=ppt/slides/slide45.xml><?xml version="1.0" encoding="utf-8"?>
+<file path=ppt/slides/slide46.xml><?xml version="1.0" encoding="utf-8"?>
 <p:sld xmlns:a="http://schemas.openxmlformats.org/drawingml/2006/main" xmlns:r="http://schemas.openxmlformats.org/officeDocument/2006/relationships" xmlns:p="http://schemas.openxmlformats.org/presentationml/2006/main">
   <p:cSld>
     <p:spTree>
@@ -25504,7 +25667,7 @@
 </p:sld>
 </file>
 
-<file path=ppt/slides/slide46.xml><?xml version="1.0" encoding="utf-8"?>
+<file path=ppt/slides/slide47.xml><?xml version="1.0" encoding="utf-8"?>
 <p:sld xmlns:a="http://schemas.openxmlformats.org/drawingml/2006/main" xmlns:r="http://schemas.openxmlformats.org/officeDocument/2006/relationships" xmlns:p="http://schemas.openxmlformats.org/presentationml/2006/main">
   <p:cSld>
     <p:spTree>
@@ -25663,7 +25826,7 @@
 </p:sld>
 </file>
 
-<file path=ppt/slides/slide47.xml><?xml version="1.0" encoding="utf-8"?>
+<file path=ppt/slides/slide48.xml><?xml version="1.0" encoding="utf-8"?>
 <p:sld xmlns:a="http://schemas.openxmlformats.org/drawingml/2006/main" xmlns:r="http://schemas.openxmlformats.org/officeDocument/2006/relationships" xmlns:p="http://schemas.openxmlformats.org/presentationml/2006/main">
   <p:cSld>
     <p:spTree>
@@ -25822,7 +25985,7 @@
 </p:sld>
 </file>
 
-<file path=ppt/slides/slide48.xml><?xml version="1.0" encoding="utf-8"?>
+<file path=ppt/slides/slide49.xml><?xml version="1.0" encoding="utf-8"?>
 <p:sld xmlns:a="http://schemas.openxmlformats.org/drawingml/2006/main" xmlns:r="http://schemas.openxmlformats.org/officeDocument/2006/relationships" xmlns:p="http://schemas.openxmlformats.org/presentationml/2006/main">
   <p:cSld>
     <p:spTree>
@@ -25973,7 +26136,171 @@
 </p:sld>
 </file>
 
-<file path=ppt/slides/slide49.xml><?xml version="1.0" encoding="utf-8"?>
+<file path=ppt/slides/slide5.xml><?xml version="1.0" encoding="utf-8"?>
+<p:sld xmlns:a="http://schemas.openxmlformats.org/drawingml/2006/main" xmlns:r="http://schemas.openxmlformats.org/officeDocument/2006/relationships" xmlns:p="http://schemas.openxmlformats.org/presentationml/2006/main">
+  <p:cSld>
+    <p:spTree>
+      <p:nvGrpSpPr>
+        <p:cNvPr id="1" name="">
+          <a:extLst>
+            <a:ext uri="{FF2B5EF4-FFF2-40B4-BE49-F238E27FC236}">
+              <a16:creationId xmlns:a16="http://schemas.microsoft.com/office/drawing/2014/main" id="{1E94AF5A-638B-145D-8A82-3BE913361371}"/>
+            </a:ext>
+          </a:extLst>
+        </p:cNvPr>
+        <p:cNvGrpSpPr/>
+        <p:nvPr/>
+      </p:nvGrpSpPr>
+      <p:grpSpPr>
+        <a:xfrm>
+          <a:off x="0" y="0"/>
+          <a:ext cx="0" cy="0"/>
+          <a:chOff x="0" y="0"/>
+          <a:chExt cx="0" cy="0"/>
+        </a:xfrm>
+      </p:grpSpPr>
+      <p:sp>
+        <p:nvSpPr>
+          <p:cNvPr id="2" name="Title 1">
+            <a:extLst>
+              <a:ext uri="{FF2B5EF4-FFF2-40B4-BE49-F238E27FC236}">
+                <a16:creationId xmlns:a16="http://schemas.microsoft.com/office/drawing/2014/main" id="{02DC3353-9A9C-3489-FDEF-EC89FA78FC11}"/>
+              </a:ext>
+            </a:extLst>
+          </p:cNvPr>
+          <p:cNvSpPr>
+            <a:spLocks noGrp="1"/>
+          </p:cNvSpPr>
+          <p:nvPr>
+            <p:ph type="title"/>
+          </p:nvPr>
+        </p:nvSpPr>
+        <p:spPr/>
+        <p:txBody>
+          <a:bodyPr>
+            <a:normAutofit fontScale="90000"/>
+          </a:bodyPr>
+          <a:lstStyle/>
+          <a:p>
+            <a:r>
+              <a:rPr lang="en-US" dirty="0"/>
+              <a:t>Reading list and presentations</a:t>
+            </a:r>
+          </a:p>
+        </p:txBody>
+      </p:sp>
+      <p:sp>
+        <p:nvSpPr>
+          <p:cNvPr id="3" name="Content Placeholder 2">
+            <a:extLst>
+              <a:ext uri="{FF2B5EF4-FFF2-40B4-BE49-F238E27FC236}">
+                <a16:creationId xmlns:a16="http://schemas.microsoft.com/office/drawing/2014/main" id="{2B47A926-0D3F-296B-21A2-0A81ED1DAB52}"/>
+              </a:ext>
+            </a:extLst>
+          </p:cNvPr>
+          <p:cNvSpPr>
+            <a:spLocks noGrp="1"/>
+          </p:cNvSpPr>
+          <p:nvPr>
+            <p:ph idx="1"/>
+          </p:nvPr>
+        </p:nvSpPr>
+        <p:spPr>
+          <a:xfrm>
+            <a:off x="598620" y="1596540"/>
+            <a:ext cx="10971652" cy="4759811"/>
+          </a:xfrm>
+        </p:spPr>
+        <p:txBody>
+          <a:bodyPr>
+            <a:normAutofit lnSpcReduction="10000"/>
+          </a:bodyPr>
+          <a:lstStyle/>
+          <a:p>
+            <a:r>
+              <a:rPr lang="en-US" dirty="0"/>
+              <a:t>There will be no final exam</a:t>
+            </a:r>
+          </a:p>
+          <a:p>
+            <a:r>
+              <a:rPr lang="en-US" dirty="0"/>
+              <a:t>I shared a Google Sheet listing a set of papers on genome assembly/annotation (in the online version of the syllabus)</a:t>
+            </a:r>
+          </a:p>
+          <a:p>
+            <a:r>
+              <a:rPr lang="en-US" dirty="0"/>
+              <a:t>Each student can choose a paper they will read (you are welcome to read more than one) </a:t>
+            </a:r>
+          </a:p>
+          <a:p>
+            <a:r>
+              <a:rPr lang="en-US" dirty="0"/>
+              <a:t>Each student will then prepare a 10-minute presentation on an aspect of a paper related to what we studied in class. </a:t>
+            </a:r>
+          </a:p>
+          <a:p>
+            <a:r>
+              <a:rPr lang="en-US" dirty="0"/>
+              <a:t>The presentations will be scheduled during the last three weeks of the course, and they are worth 12% of the grade</a:t>
+            </a:r>
+          </a:p>
+          <a:p>
+            <a:r>
+              <a:rPr lang="en-US" dirty="0"/>
+              <a:t>You must show that you’ve read the paper. Reading AI-prepared presentation notes from your phone screen will not earn you full credit</a:t>
+            </a:r>
+          </a:p>
+          <a:p>
+            <a:endParaRPr lang="en-US" dirty="0"/>
+          </a:p>
+        </p:txBody>
+      </p:sp>
+      <p:sp>
+        <p:nvSpPr>
+          <p:cNvPr id="4" name="Slide Number Placeholder 3">
+            <a:extLst>
+              <a:ext uri="{FF2B5EF4-FFF2-40B4-BE49-F238E27FC236}">
+                <a16:creationId xmlns:a16="http://schemas.microsoft.com/office/drawing/2014/main" id="{CA619E31-38DC-B6A3-9554-C6BA937F30D2}"/>
+              </a:ext>
+            </a:extLst>
+          </p:cNvPr>
+          <p:cNvSpPr>
+            <a:spLocks noGrp="1"/>
+          </p:cNvSpPr>
+          <p:nvPr>
+            <p:ph type="sldNum" sz="quarter" idx="12"/>
+          </p:nvPr>
+        </p:nvSpPr>
+        <p:spPr/>
+        <p:txBody>
+          <a:bodyPr/>
+          <a:lstStyle/>
+          <a:p>
+            <a:fld id="{B82CCC60-E8CD-4174-8B1A-7DF615B22EEF}" type="slidenum">
+              <a:rPr lang="en-US" smtClean="0"/>
+              <a:pPr/>
+              <a:t>5</a:t>
+            </a:fld>
+            <a:endParaRPr lang="en-US"/>
+          </a:p>
+        </p:txBody>
+      </p:sp>
+    </p:spTree>
+    <p:extLst>
+      <p:ext uri="{BB962C8B-B14F-4D97-AF65-F5344CB8AC3E}">
+        <p14:creationId xmlns:p14="http://schemas.microsoft.com/office/powerpoint/2010/main" val="3790567690"/>
+      </p:ext>
+    </p:extLst>
+  </p:cSld>
+  <p:clrMapOvr>
+    <a:masterClrMapping/>
+  </p:clrMapOvr>
+</p:sld>
+</file>
+
+<file path=ppt/slides/slide50.xml><?xml version="1.0" encoding="utf-8"?>
 <p:sld xmlns:a="http://schemas.openxmlformats.org/drawingml/2006/main" xmlns:r="http://schemas.openxmlformats.org/officeDocument/2006/relationships" xmlns:p="http://schemas.openxmlformats.org/presentationml/2006/main">
   <p:cSld>
     <p:spTree>
@@ -26069,171 +26396,7 @@
 </p:sld>
 </file>
 
-<file path=ppt/slides/slide5.xml><?xml version="1.0" encoding="utf-8"?>
-<p:sld xmlns:a="http://schemas.openxmlformats.org/drawingml/2006/main" xmlns:r="http://schemas.openxmlformats.org/officeDocument/2006/relationships" xmlns:p="http://schemas.openxmlformats.org/presentationml/2006/main">
-  <p:cSld>
-    <p:spTree>
-      <p:nvGrpSpPr>
-        <p:cNvPr id="1" name="">
-          <a:extLst>
-            <a:ext uri="{FF2B5EF4-FFF2-40B4-BE49-F238E27FC236}">
-              <a16:creationId xmlns:a16="http://schemas.microsoft.com/office/drawing/2014/main" id="{1E94AF5A-638B-145D-8A82-3BE913361371}"/>
-            </a:ext>
-          </a:extLst>
-        </p:cNvPr>
-        <p:cNvGrpSpPr/>
-        <p:nvPr/>
-      </p:nvGrpSpPr>
-      <p:grpSpPr>
-        <a:xfrm>
-          <a:off x="0" y="0"/>
-          <a:ext cx="0" cy="0"/>
-          <a:chOff x="0" y="0"/>
-          <a:chExt cx="0" cy="0"/>
-        </a:xfrm>
-      </p:grpSpPr>
-      <p:sp>
-        <p:nvSpPr>
-          <p:cNvPr id="2" name="Title 1">
-            <a:extLst>
-              <a:ext uri="{FF2B5EF4-FFF2-40B4-BE49-F238E27FC236}">
-                <a16:creationId xmlns:a16="http://schemas.microsoft.com/office/drawing/2014/main" id="{02DC3353-9A9C-3489-FDEF-EC89FA78FC11}"/>
-              </a:ext>
-            </a:extLst>
-          </p:cNvPr>
-          <p:cNvSpPr>
-            <a:spLocks noGrp="1"/>
-          </p:cNvSpPr>
-          <p:nvPr>
-            <p:ph type="title"/>
-          </p:nvPr>
-        </p:nvSpPr>
-        <p:spPr/>
-        <p:txBody>
-          <a:bodyPr>
-            <a:normAutofit fontScale="90000"/>
-          </a:bodyPr>
-          <a:lstStyle/>
-          <a:p>
-            <a:r>
-              <a:rPr lang="en-US" dirty="0"/>
-              <a:t>Reading list and presentations</a:t>
-            </a:r>
-          </a:p>
-        </p:txBody>
-      </p:sp>
-      <p:sp>
-        <p:nvSpPr>
-          <p:cNvPr id="3" name="Content Placeholder 2">
-            <a:extLst>
-              <a:ext uri="{FF2B5EF4-FFF2-40B4-BE49-F238E27FC236}">
-                <a16:creationId xmlns:a16="http://schemas.microsoft.com/office/drawing/2014/main" id="{2B47A926-0D3F-296B-21A2-0A81ED1DAB52}"/>
-              </a:ext>
-            </a:extLst>
-          </p:cNvPr>
-          <p:cNvSpPr>
-            <a:spLocks noGrp="1"/>
-          </p:cNvSpPr>
-          <p:nvPr>
-            <p:ph idx="1"/>
-          </p:nvPr>
-        </p:nvSpPr>
-        <p:spPr>
-          <a:xfrm>
-            <a:off x="598620" y="1596540"/>
-            <a:ext cx="10971652" cy="4759811"/>
-          </a:xfrm>
-        </p:spPr>
-        <p:txBody>
-          <a:bodyPr>
-            <a:normAutofit lnSpcReduction="10000"/>
-          </a:bodyPr>
-          <a:lstStyle/>
-          <a:p>
-            <a:r>
-              <a:rPr lang="en-US" dirty="0"/>
-              <a:t>There will be no final exam</a:t>
-            </a:r>
-          </a:p>
-          <a:p>
-            <a:r>
-              <a:rPr lang="en-US" dirty="0"/>
-              <a:t>I shared a Google Sheet listing a set of papers on genome assembly/annotation (in the online version of the syllabus)</a:t>
-            </a:r>
-          </a:p>
-          <a:p>
-            <a:r>
-              <a:rPr lang="en-US" dirty="0"/>
-              <a:t>Each student can choose a paper they will read (you are welcome to read more than one) </a:t>
-            </a:r>
-          </a:p>
-          <a:p>
-            <a:r>
-              <a:rPr lang="en-US" dirty="0"/>
-              <a:t>Each student will then prepare a 10-minute presentation on an aspect of a paper related to what we studied in class. </a:t>
-            </a:r>
-          </a:p>
-          <a:p>
-            <a:r>
-              <a:rPr lang="en-US" dirty="0"/>
-              <a:t>The presentations will be scheduled during the last three weeks of the course, and they are worth 12% of the grade</a:t>
-            </a:r>
-          </a:p>
-          <a:p>
-            <a:r>
-              <a:rPr lang="en-US" dirty="0"/>
-              <a:t>You must show that you’ve read the paper. Reading AI-prepared presentation notes from your phone screen will not earn you full credit</a:t>
-            </a:r>
-          </a:p>
-          <a:p>
-            <a:endParaRPr lang="en-US" dirty="0"/>
-          </a:p>
-        </p:txBody>
-      </p:sp>
-      <p:sp>
-        <p:nvSpPr>
-          <p:cNvPr id="4" name="Slide Number Placeholder 3">
-            <a:extLst>
-              <a:ext uri="{FF2B5EF4-FFF2-40B4-BE49-F238E27FC236}">
-                <a16:creationId xmlns:a16="http://schemas.microsoft.com/office/drawing/2014/main" id="{CA619E31-38DC-B6A3-9554-C6BA937F30D2}"/>
-              </a:ext>
-            </a:extLst>
-          </p:cNvPr>
-          <p:cNvSpPr>
-            <a:spLocks noGrp="1"/>
-          </p:cNvSpPr>
-          <p:nvPr>
-            <p:ph type="sldNum" sz="quarter" idx="12"/>
-          </p:nvPr>
-        </p:nvSpPr>
-        <p:spPr/>
-        <p:txBody>
-          <a:bodyPr/>
-          <a:lstStyle/>
-          <a:p>
-            <a:fld id="{B82CCC60-E8CD-4174-8B1A-7DF615B22EEF}" type="slidenum">
-              <a:rPr lang="en-US" smtClean="0"/>
-              <a:pPr/>
-              <a:t>5</a:t>
-            </a:fld>
-            <a:endParaRPr lang="en-US"/>
-          </a:p>
-        </p:txBody>
-      </p:sp>
-    </p:spTree>
-    <p:extLst>
-      <p:ext uri="{BB962C8B-B14F-4D97-AF65-F5344CB8AC3E}">
-        <p14:creationId xmlns:p14="http://schemas.microsoft.com/office/powerpoint/2010/main" val="3790567690"/>
-      </p:ext>
-    </p:extLst>
-  </p:cSld>
-  <p:clrMapOvr>
-    <a:masterClrMapping/>
-  </p:clrMapOvr>
-</p:sld>
-</file>
-
-<file path=ppt/slides/slide50.xml><?xml version="1.0" encoding="utf-8"?>
+<file path=ppt/slides/slide51.xml><?xml version="1.0" encoding="utf-8"?>
 <p:sld xmlns:a="http://schemas.openxmlformats.org/drawingml/2006/main" xmlns:r="http://schemas.openxmlformats.org/officeDocument/2006/relationships" xmlns:p="http://schemas.openxmlformats.org/presentationml/2006/main">
   <p:cSld>
     <p:spTree>
@@ -26381,7 +26544,7 @@
 </p:sld>
 </file>
 
-<file path=ppt/slides/slide51.xml><?xml version="1.0" encoding="utf-8"?>
+<file path=ppt/slides/slide52.xml><?xml version="1.0" encoding="utf-8"?>
 <p:sld xmlns:a="http://schemas.openxmlformats.org/drawingml/2006/main" xmlns:r="http://schemas.openxmlformats.org/officeDocument/2006/relationships" xmlns:p="http://schemas.openxmlformats.org/presentationml/2006/main">
   <p:cSld>
     <p:spTree>
@@ -26535,7 +26698,7 @@
 </p:sld>
 </file>
 
-<file path=ppt/slides/slide52.xml><?xml version="1.0" encoding="utf-8"?>
+<file path=ppt/slides/slide53.xml><?xml version="1.0" encoding="utf-8"?>
 <p:sld xmlns:a="http://schemas.openxmlformats.org/drawingml/2006/main" xmlns:r="http://schemas.openxmlformats.org/officeDocument/2006/relationships" xmlns:p="http://schemas.openxmlformats.org/presentationml/2006/main">
   <p:cSld>
     <p:spTree>
@@ -26683,7 +26846,7 @@
 </p:sld>
 </file>
 
-<file path=ppt/slides/slide53.xml><?xml version="1.0" encoding="utf-8"?>
+<file path=ppt/slides/slide54.xml><?xml version="1.0" encoding="utf-8"?>
 <p:sld xmlns:a="http://schemas.openxmlformats.org/drawingml/2006/main" xmlns:r="http://schemas.openxmlformats.org/officeDocument/2006/relationships" xmlns:p="http://schemas.openxmlformats.org/presentationml/2006/main">
   <p:cSld>
     <p:spTree>
@@ -26892,7 +27055,7 @@
 </p:sld>
 </file>
 
-<file path=ppt/slides/slide54.xml><?xml version="1.0" encoding="utf-8"?>
+<file path=ppt/slides/slide55.xml><?xml version="1.0" encoding="utf-8"?>
 <p:sld xmlns:a="http://schemas.openxmlformats.org/drawingml/2006/main" xmlns:r="http://schemas.openxmlformats.org/officeDocument/2006/relationships" xmlns:p="http://schemas.openxmlformats.org/presentationml/2006/main">
   <p:cSld>
     <p:spTree>
@@ -27029,7 +27192,7 @@
             <a:fld id="{B82CCC60-E8CD-4174-8B1A-7DF615B22EEF}" type="slidenum">
               <a:rPr lang="en-US" smtClean="0"/>
               <a:pPr/>
-              <a:t>54</a:t>
+              <a:t>55</a:t>
             </a:fld>
             <a:endParaRPr lang="en-US"/>
           </a:p>
@@ -27544,7 +27707,7 @@
 </p:sld>
 </file>
 
-<file path=ppt/slides/slide55.xml><?xml version="1.0" encoding="utf-8"?>
+<file path=ppt/slides/slide56.xml><?xml version="1.0" encoding="utf-8"?>
 <p:sld xmlns:a="http://schemas.openxmlformats.org/drawingml/2006/main" xmlns:r="http://schemas.openxmlformats.org/officeDocument/2006/relationships" xmlns:p="http://schemas.openxmlformats.org/presentationml/2006/main">
   <p:cSld>
     <p:spTree>
@@ -27682,7 +27845,7 @@
             <a:fld id="{B82CCC60-E8CD-4174-8B1A-7DF615B22EEF}" type="slidenum">
               <a:rPr lang="en-US" smtClean="0"/>
               <a:pPr/>
-              <a:t>55</a:t>
+              <a:t>56</a:t>
             </a:fld>
             <a:endParaRPr lang="en-US"/>
           </a:p>
@@ -27701,7 +27864,7 @@
 </p:sld>
 </file>
 
-<file path=ppt/slides/slide56.xml><?xml version="1.0" encoding="utf-8"?>
+<file path=ppt/slides/slide57.xml><?xml version="1.0" encoding="utf-8"?>
 <p:sld xmlns:a="http://schemas.openxmlformats.org/drawingml/2006/main" xmlns:r="http://schemas.openxmlformats.org/officeDocument/2006/relationships" xmlns:p="http://schemas.openxmlformats.org/presentationml/2006/main">
   <p:cSld>
     <p:spTree>
@@ -27876,7 +28039,7 @@
             <a:fld id="{B82CCC60-E8CD-4174-8B1A-7DF615B22EEF}" type="slidenum">
               <a:rPr lang="en-US" smtClean="0"/>
               <a:pPr/>
-              <a:t>56</a:t>
+              <a:t>57</a:t>
             </a:fld>
             <a:endParaRPr lang="en-US"/>
           </a:p>
@@ -27925,158 +28088,6 @@
 </p:sld>
 </file>
 
-<file path=ppt/slides/slide57.xml><?xml version="1.0" encoding="utf-8"?>
-<p:sld xmlns:a="http://schemas.openxmlformats.org/drawingml/2006/main" xmlns:r="http://schemas.openxmlformats.org/officeDocument/2006/relationships" xmlns:p="http://schemas.openxmlformats.org/presentationml/2006/main">
-  <p:cSld>
-    <p:spTree>
-      <p:nvGrpSpPr>
-        <p:cNvPr id="1" name=""/>
-        <p:cNvGrpSpPr/>
-        <p:nvPr/>
-      </p:nvGrpSpPr>
-      <p:grpSpPr>
-        <a:xfrm>
-          <a:off x="0" y="0"/>
-          <a:ext cx="0" cy="0"/>
-          <a:chOff x="0" y="0"/>
-          <a:chExt cx="0" cy="0"/>
-        </a:xfrm>
-      </p:grpSpPr>
-      <p:sp>
-        <p:nvSpPr>
-          <p:cNvPr id="2" name="Title 1">
-            <a:extLst>
-              <a:ext uri="{FF2B5EF4-FFF2-40B4-BE49-F238E27FC236}">
-                <a16:creationId xmlns:a16="http://schemas.microsoft.com/office/drawing/2014/main" id="{0590F2AB-54BB-621B-65D8-BD0BA66500C5}"/>
-              </a:ext>
-            </a:extLst>
-          </p:cNvPr>
-          <p:cNvSpPr>
-            <a:spLocks noGrp="1"/>
-          </p:cNvSpPr>
-          <p:nvPr>
-            <p:ph type="title"/>
-          </p:nvPr>
-        </p:nvSpPr>
-        <p:spPr/>
-        <p:txBody>
-          <a:bodyPr>
-            <a:normAutofit fontScale="90000"/>
-          </a:bodyPr>
-          <a:lstStyle/>
-          <a:p>
-            <a:r>
-              <a:rPr lang="en-US"/>
-              <a:t>Example of a Poisson process</a:t>
-            </a:r>
-          </a:p>
-        </p:txBody>
-      </p:sp>
-      <p:sp>
-        <p:nvSpPr>
-          <p:cNvPr id="3" name="Content Placeholder 2">
-            <a:extLst>
-              <a:ext uri="{FF2B5EF4-FFF2-40B4-BE49-F238E27FC236}">
-                <a16:creationId xmlns:a16="http://schemas.microsoft.com/office/drawing/2014/main" id="{CC2B5123-4384-2287-DCAD-BCF274FCFC02}"/>
-              </a:ext>
-            </a:extLst>
-          </p:cNvPr>
-          <p:cNvSpPr>
-            <a:spLocks noGrp="1"/>
-          </p:cNvSpPr>
-          <p:nvPr>
-            <p:ph idx="1"/>
-          </p:nvPr>
-        </p:nvSpPr>
-        <p:spPr/>
-        <p:txBody>
-          <a:bodyPr/>
-          <a:lstStyle/>
-          <a:p>
-            <a:r>
-              <a:rPr lang="en-US"/>
-              <a:t>For instance, consider a call center which receives an average of </a:t>
-            </a:r>
-            <a:r>
-              <a:rPr lang="en-US" i="1"/>
-              <a:t>λ = 3 </a:t>
-            </a:r>
-            <a:r>
-              <a:rPr lang="en-US"/>
-              <a:t>calls per minute at all times of day. </a:t>
-            </a:r>
-          </a:p>
-          <a:p>
-            <a:r>
-              <a:rPr lang="en-US"/>
-              <a:t>If the number of calls received in any two given disjoint time intervals is independent, then the number </a:t>
-            </a:r>
-            <a:r>
-              <a:rPr lang="en-US" i="1"/>
-              <a:t>k</a:t>
-            </a:r>
-            <a:r>
-              <a:rPr lang="en-US"/>
-              <a:t> of calls received during any minute has a Poisson probability distribution. </a:t>
-            </a:r>
-          </a:p>
-          <a:p>
-            <a:endParaRPr lang="en-US"/>
-          </a:p>
-          <a:p>
-            <a:r>
-              <a:rPr lang="en-US"/>
-              <a:t>Can you come up with an example?</a:t>
-            </a:r>
-          </a:p>
-          <a:p>
-            <a:endParaRPr lang="en-US"/>
-          </a:p>
-        </p:txBody>
-      </p:sp>
-      <p:sp>
-        <p:nvSpPr>
-          <p:cNvPr id="4" name="Slide Number Placeholder 3">
-            <a:extLst>
-              <a:ext uri="{FF2B5EF4-FFF2-40B4-BE49-F238E27FC236}">
-                <a16:creationId xmlns:a16="http://schemas.microsoft.com/office/drawing/2014/main" id="{27ED25BA-7001-3F78-56D2-129F3E7E14C2}"/>
-              </a:ext>
-            </a:extLst>
-          </p:cNvPr>
-          <p:cNvSpPr>
-            <a:spLocks noGrp="1"/>
-          </p:cNvSpPr>
-          <p:nvPr>
-            <p:ph type="sldNum" sz="quarter" idx="12"/>
-          </p:nvPr>
-        </p:nvSpPr>
-        <p:spPr/>
-        <p:txBody>
-          <a:bodyPr/>
-          <a:lstStyle/>
-          <a:p>
-            <a:fld id="{B82CCC60-E8CD-4174-8B1A-7DF615B22EEF}" type="slidenum">
-              <a:rPr lang="en-US" smtClean="0"/>
-              <a:pPr/>
-              <a:t>57</a:t>
-            </a:fld>
-            <a:endParaRPr lang="en-US"/>
-          </a:p>
-        </p:txBody>
-      </p:sp>
-    </p:spTree>
-    <p:extLst>
-      <p:ext uri="{BB962C8B-B14F-4D97-AF65-F5344CB8AC3E}">
-        <p14:creationId xmlns:p14="http://schemas.microsoft.com/office/powerpoint/2010/main" val="2188530791"/>
-      </p:ext>
-    </p:extLst>
-  </p:cSld>
-  <p:clrMapOvr>
-    <a:masterClrMapping/>
-  </p:clrMapOvr>
-</p:sld>
-</file>
-
 <file path=ppt/slides/slide58.xml><?xml version="1.0" encoding="utf-8"?>
 <p:sld xmlns:a="http://schemas.openxmlformats.org/drawingml/2006/main" xmlns:r="http://schemas.openxmlformats.org/officeDocument/2006/relationships" xmlns:p="http://schemas.openxmlformats.org/presentationml/2006/main">
   <p:cSld>
@@ -28099,6 +28110,158 @@
           <p:cNvPr id="2" name="Title 1">
             <a:extLst>
               <a:ext uri="{FF2B5EF4-FFF2-40B4-BE49-F238E27FC236}">
+                <a16:creationId xmlns:a16="http://schemas.microsoft.com/office/drawing/2014/main" id="{0590F2AB-54BB-621B-65D8-BD0BA66500C5}"/>
+              </a:ext>
+            </a:extLst>
+          </p:cNvPr>
+          <p:cNvSpPr>
+            <a:spLocks noGrp="1"/>
+          </p:cNvSpPr>
+          <p:nvPr>
+            <p:ph type="title"/>
+          </p:nvPr>
+        </p:nvSpPr>
+        <p:spPr/>
+        <p:txBody>
+          <a:bodyPr>
+            <a:normAutofit fontScale="90000"/>
+          </a:bodyPr>
+          <a:lstStyle/>
+          <a:p>
+            <a:r>
+              <a:rPr lang="en-US"/>
+              <a:t>Example of a Poisson process</a:t>
+            </a:r>
+          </a:p>
+        </p:txBody>
+      </p:sp>
+      <p:sp>
+        <p:nvSpPr>
+          <p:cNvPr id="3" name="Content Placeholder 2">
+            <a:extLst>
+              <a:ext uri="{FF2B5EF4-FFF2-40B4-BE49-F238E27FC236}">
+                <a16:creationId xmlns:a16="http://schemas.microsoft.com/office/drawing/2014/main" id="{CC2B5123-4384-2287-DCAD-BCF274FCFC02}"/>
+              </a:ext>
+            </a:extLst>
+          </p:cNvPr>
+          <p:cNvSpPr>
+            <a:spLocks noGrp="1"/>
+          </p:cNvSpPr>
+          <p:nvPr>
+            <p:ph idx="1"/>
+          </p:nvPr>
+        </p:nvSpPr>
+        <p:spPr/>
+        <p:txBody>
+          <a:bodyPr/>
+          <a:lstStyle/>
+          <a:p>
+            <a:r>
+              <a:rPr lang="en-US"/>
+              <a:t>For instance, consider a call center which receives an average of </a:t>
+            </a:r>
+            <a:r>
+              <a:rPr lang="en-US" i="1"/>
+              <a:t>λ = 3 </a:t>
+            </a:r>
+            <a:r>
+              <a:rPr lang="en-US"/>
+              <a:t>calls per minute at all times of day. </a:t>
+            </a:r>
+          </a:p>
+          <a:p>
+            <a:r>
+              <a:rPr lang="en-US"/>
+              <a:t>If the number of calls received in any two given disjoint time intervals is independent, then the number </a:t>
+            </a:r>
+            <a:r>
+              <a:rPr lang="en-US" i="1"/>
+              <a:t>k</a:t>
+            </a:r>
+            <a:r>
+              <a:rPr lang="en-US"/>
+              <a:t> of calls received during any minute has a Poisson probability distribution. </a:t>
+            </a:r>
+          </a:p>
+          <a:p>
+            <a:endParaRPr lang="en-US"/>
+          </a:p>
+          <a:p>
+            <a:r>
+              <a:rPr lang="en-US"/>
+              <a:t>Can you come up with an example?</a:t>
+            </a:r>
+          </a:p>
+          <a:p>
+            <a:endParaRPr lang="en-US"/>
+          </a:p>
+        </p:txBody>
+      </p:sp>
+      <p:sp>
+        <p:nvSpPr>
+          <p:cNvPr id="4" name="Slide Number Placeholder 3">
+            <a:extLst>
+              <a:ext uri="{FF2B5EF4-FFF2-40B4-BE49-F238E27FC236}">
+                <a16:creationId xmlns:a16="http://schemas.microsoft.com/office/drawing/2014/main" id="{27ED25BA-7001-3F78-56D2-129F3E7E14C2}"/>
+              </a:ext>
+            </a:extLst>
+          </p:cNvPr>
+          <p:cNvSpPr>
+            <a:spLocks noGrp="1"/>
+          </p:cNvSpPr>
+          <p:nvPr>
+            <p:ph type="sldNum" sz="quarter" idx="12"/>
+          </p:nvPr>
+        </p:nvSpPr>
+        <p:spPr/>
+        <p:txBody>
+          <a:bodyPr/>
+          <a:lstStyle/>
+          <a:p>
+            <a:fld id="{B82CCC60-E8CD-4174-8B1A-7DF615B22EEF}" type="slidenum">
+              <a:rPr lang="en-US" smtClean="0"/>
+              <a:pPr/>
+              <a:t>58</a:t>
+            </a:fld>
+            <a:endParaRPr lang="en-US"/>
+          </a:p>
+        </p:txBody>
+      </p:sp>
+    </p:spTree>
+    <p:extLst>
+      <p:ext uri="{BB962C8B-B14F-4D97-AF65-F5344CB8AC3E}">
+        <p14:creationId xmlns:p14="http://schemas.microsoft.com/office/powerpoint/2010/main" val="2188530791"/>
+      </p:ext>
+    </p:extLst>
+  </p:cSld>
+  <p:clrMapOvr>
+    <a:masterClrMapping/>
+  </p:clrMapOvr>
+</p:sld>
+</file>
+
+<file path=ppt/slides/slide59.xml><?xml version="1.0" encoding="utf-8"?>
+<p:sld xmlns:a="http://schemas.openxmlformats.org/drawingml/2006/main" xmlns:r="http://schemas.openxmlformats.org/officeDocument/2006/relationships" xmlns:p="http://schemas.openxmlformats.org/presentationml/2006/main">
+  <p:cSld>
+    <p:spTree>
+      <p:nvGrpSpPr>
+        <p:cNvPr id="1" name=""/>
+        <p:cNvGrpSpPr/>
+        <p:nvPr/>
+      </p:nvGrpSpPr>
+      <p:grpSpPr>
+        <a:xfrm>
+          <a:off x="0" y="0"/>
+          <a:ext cx="0" cy="0"/>
+          <a:chOff x="0" y="0"/>
+          <a:chExt cx="0" cy="0"/>
+        </a:xfrm>
+      </p:grpSpPr>
+      <p:sp>
+        <p:nvSpPr>
+          <p:cNvPr id="2" name="Title 1">
+            <a:extLst>
+              <a:ext uri="{FF2B5EF4-FFF2-40B4-BE49-F238E27FC236}">
                 <a16:creationId xmlns:a16="http://schemas.microsoft.com/office/drawing/2014/main" id="{34EEF9DE-D844-088B-EFB7-D7DE8020733F}"/>
               </a:ext>
             </a:extLst>
@@ -28233,7 +28396,7 @@
             <a:fld id="{B82CCC60-E8CD-4174-8B1A-7DF615B22EEF}" type="slidenum">
               <a:rPr lang="en-US" smtClean="0"/>
               <a:pPr/>
-              <a:t>58</a:t>
+              <a:t>59</a:t>
             </a:fld>
             <a:endParaRPr lang="en-US"/>
           </a:p>
@@ -28282,7 +28445,7 @@
 </p:sld>
 </file>
 
-<file path=ppt/slides/slide59.xml><?xml version="1.0" encoding="utf-8"?>
+<file path=ppt/slides/slide6.xml><?xml version="1.0" encoding="utf-8"?>
 <p:sld xmlns:a="http://schemas.openxmlformats.org/drawingml/2006/main" xmlns:r="http://schemas.openxmlformats.org/officeDocument/2006/relationships" xmlns:p="http://schemas.openxmlformats.org/presentationml/2006/main">
   <p:cSld>
     <p:spTree>
@@ -28304,6 +28467,158 @@
           <p:cNvPr id="2" name="Title 1">
             <a:extLst>
               <a:ext uri="{FF2B5EF4-FFF2-40B4-BE49-F238E27FC236}">
+                <a16:creationId xmlns:a16="http://schemas.microsoft.com/office/drawing/2014/main" id="{8F1E613B-1931-5322-CE3B-0410BFF18CCF}"/>
+              </a:ext>
+            </a:extLst>
+          </p:cNvPr>
+          <p:cNvSpPr>
+            <a:spLocks noGrp="1"/>
+          </p:cNvSpPr>
+          <p:nvPr>
+            <p:ph type="title"/>
+          </p:nvPr>
+        </p:nvSpPr>
+        <p:spPr/>
+        <p:txBody>
+          <a:bodyPr>
+            <a:normAutofit fontScale="90000"/>
+          </a:bodyPr>
+          <a:lstStyle/>
+          <a:p>
+            <a:r>
+              <a:rPr lang="en-US" dirty="0"/>
+              <a:t>Concepts we will learn</a:t>
+            </a:r>
+          </a:p>
+        </p:txBody>
+      </p:sp>
+      <p:sp>
+        <p:nvSpPr>
+          <p:cNvPr id="3" name="Content Placeholder 2">
+            <a:extLst>
+              <a:ext uri="{FF2B5EF4-FFF2-40B4-BE49-F238E27FC236}">
+                <a16:creationId xmlns:a16="http://schemas.microsoft.com/office/drawing/2014/main" id="{350B2E19-F44E-A885-A753-15020D4916B1}"/>
+              </a:ext>
+            </a:extLst>
+          </p:cNvPr>
+          <p:cNvSpPr>
+            <a:spLocks noGrp="1"/>
+          </p:cNvSpPr>
+          <p:nvPr>
+            <p:ph idx="1"/>
+          </p:nvPr>
+        </p:nvSpPr>
+        <p:spPr>
+          <a:xfrm>
+            <a:off x="609600" y="1872092"/>
+            <a:ext cx="10972800" cy="4666821"/>
+          </a:xfrm>
+        </p:spPr>
+        <p:txBody>
+          <a:bodyPr>
+            <a:normAutofit/>
+          </a:bodyPr>
+          <a:lstStyle/>
+          <a:p>
+            <a:r>
+              <a:rPr lang="en-US" dirty="0"/>
+              <a:t>Basics of DNA/RNA sequencing</a:t>
+            </a:r>
+          </a:p>
+          <a:p>
+            <a:r>
+              <a:rPr lang="en-US" dirty="0"/>
+              <a:t>Alignment of DNA/RNA/AA sequences, suffix arrays, BW transform, Smith-Waterman alignment</a:t>
+            </a:r>
+          </a:p>
+          <a:p>
+            <a:r>
+              <a:rPr lang="en-US" dirty="0"/>
+              <a:t>Assembly methods of DNA/RNA sequencing data and corresponding data structures: k-mer and overlap graphs</a:t>
+            </a:r>
+          </a:p>
+          <a:p>
+            <a:r>
+              <a:rPr lang="en-US" dirty="0"/>
+              <a:t>Evaluation of assemblies</a:t>
+            </a:r>
+          </a:p>
+          <a:p>
+            <a:r>
+              <a:rPr lang="en-US" dirty="0"/>
+              <a:t>Making sense of the genomic sequence -- introduction to genome annotation, use of deep learning in genome annotation</a:t>
+            </a:r>
+          </a:p>
+          <a:p>
+            <a:endParaRPr lang="en-US" dirty="0"/>
+          </a:p>
+        </p:txBody>
+      </p:sp>
+      <p:sp>
+        <p:nvSpPr>
+          <p:cNvPr id="4" name="Slide Number Placeholder 3">
+            <a:extLst>
+              <a:ext uri="{FF2B5EF4-FFF2-40B4-BE49-F238E27FC236}">
+                <a16:creationId xmlns:a16="http://schemas.microsoft.com/office/drawing/2014/main" id="{AE15C277-C6A4-E5B7-63B3-0BC8B74D377D}"/>
+              </a:ext>
+            </a:extLst>
+          </p:cNvPr>
+          <p:cNvSpPr>
+            <a:spLocks noGrp="1"/>
+          </p:cNvSpPr>
+          <p:nvPr>
+            <p:ph type="sldNum" sz="quarter" idx="12"/>
+          </p:nvPr>
+        </p:nvSpPr>
+        <p:spPr/>
+        <p:txBody>
+          <a:bodyPr/>
+          <a:lstStyle/>
+          <a:p>
+            <a:fld id="{B82CCC60-E8CD-4174-8B1A-7DF615B22EEF}" type="slidenum">
+              <a:rPr lang="en-US" smtClean="0"/>
+              <a:pPr/>
+              <a:t>6</a:t>
+            </a:fld>
+            <a:endParaRPr lang="en-US"/>
+          </a:p>
+        </p:txBody>
+      </p:sp>
+    </p:spTree>
+    <p:extLst>
+      <p:ext uri="{BB962C8B-B14F-4D97-AF65-F5344CB8AC3E}">
+        <p14:creationId xmlns:p14="http://schemas.microsoft.com/office/powerpoint/2010/main" val="3431220297"/>
+      </p:ext>
+    </p:extLst>
+  </p:cSld>
+  <p:clrMapOvr>
+    <a:masterClrMapping/>
+  </p:clrMapOvr>
+</p:sld>
+</file>
+
+<file path=ppt/slides/slide60.xml><?xml version="1.0" encoding="utf-8"?>
+<p:sld xmlns:a="http://schemas.openxmlformats.org/drawingml/2006/main" xmlns:r="http://schemas.openxmlformats.org/officeDocument/2006/relationships" xmlns:p="http://schemas.openxmlformats.org/presentationml/2006/main">
+  <p:cSld>
+    <p:spTree>
+      <p:nvGrpSpPr>
+        <p:cNvPr id="1" name=""/>
+        <p:cNvGrpSpPr/>
+        <p:nvPr/>
+      </p:nvGrpSpPr>
+      <p:grpSpPr>
+        <a:xfrm>
+          <a:off x="0" y="0"/>
+          <a:ext cx="0" cy="0"/>
+          <a:chOff x="0" y="0"/>
+          <a:chExt cx="0" cy="0"/>
+        </a:xfrm>
+      </p:grpSpPr>
+      <p:sp>
+        <p:nvSpPr>
+          <p:cNvPr id="2" name="Title 1">
+            <a:extLst>
+              <a:ext uri="{FF2B5EF4-FFF2-40B4-BE49-F238E27FC236}">
                 <a16:creationId xmlns:a16="http://schemas.microsoft.com/office/drawing/2014/main" id="{9EFCF05B-22D4-255A-5907-D8318D8634FB}"/>
               </a:ext>
             </a:extLst>
@@ -28535,7 +28850,7 @@
             <a:fld id="{B82CCC60-E8CD-4174-8B1A-7DF615B22EEF}" type="slidenum">
               <a:rPr lang="en-US" smtClean="0"/>
               <a:pPr/>
-              <a:t>59</a:t>
+              <a:t>60</a:t>
             </a:fld>
             <a:endParaRPr lang="en-US"/>
           </a:p>
@@ -29992,159 +30307,7 @@
 </p:sld>
 </file>
 
-<file path=ppt/slides/slide6.xml><?xml version="1.0" encoding="utf-8"?>
-<p:sld xmlns:a="http://schemas.openxmlformats.org/drawingml/2006/main" xmlns:r="http://schemas.openxmlformats.org/officeDocument/2006/relationships" xmlns:p="http://schemas.openxmlformats.org/presentationml/2006/main">
-  <p:cSld>
-    <p:spTree>
-      <p:nvGrpSpPr>
-        <p:cNvPr id="1" name=""/>
-        <p:cNvGrpSpPr/>
-        <p:nvPr/>
-      </p:nvGrpSpPr>
-      <p:grpSpPr>
-        <a:xfrm>
-          <a:off x="0" y="0"/>
-          <a:ext cx="0" cy="0"/>
-          <a:chOff x="0" y="0"/>
-          <a:chExt cx="0" cy="0"/>
-        </a:xfrm>
-      </p:grpSpPr>
-      <p:sp>
-        <p:nvSpPr>
-          <p:cNvPr id="2" name="Title 1">
-            <a:extLst>
-              <a:ext uri="{FF2B5EF4-FFF2-40B4-BE49-F238E27FC236}">
-                <a16:creationId xmlns:a16="http://schemas.microsoft.com/office/drawing/2014/main" id="{8F1E613B-1931-5322-CE3B-0410BFF18CCF}"/>
-              </a:ext>
-            </a:extLst>
-          </p:cNvPr>
-          <p:cNvSpPr>
-            <a:spLocks noGrp="1"/>
-          </p:cNvSpPr>
-          <p:nvPr>
-            <p:ph type="title"/>
-          </p:nvPr>
-        </p:nvSpPr>
-        <p:spPr/>
-        <p:txBody>
-          <a:bodyPr>
-            <a:normAutofit fontScale="90000"/>
-          </a:bodyPr>
-          <a:lstStyle/>
-          <a:p>
-            <a:r>
-              <a:rPr lang="en-US" dirty="0"/>
-              <a:t>Concepts we will learn</a:t>
-            </a:r>
-          </a:p>
-        </p:txBody>
-      </p:sp>
-      <p:sp>
-        <p:nvSpPr>
-          <p:cNvPr id="3" name="Content Placeholder 2">
-            <a:extLst>
-              <a:ext uri="{FF2B5EF4-FFF2-40B4-BE49-F238E27FC236}">
-                <a16:creationId xmlns:a16="http://schemas.microsoft.com/office/drawing/2014/main" id="{350B2E19-F44E-A885-A753-15020D4916B1}"/>
-              </a:ext>
-            </a:extLst>
-          </p:cNvPr>
-          <p:cNvSpPr>
-            <a:spLocks noGrp="1"/>
-          </p:cNvSpPr>
-          <p:nvPr>
-            <p:ph idx="1"/>
-          </p:nvPr>
-        </p:nvSpPr>
-        <p:spPr>
-          <a:xfrm>
-            <a:off x="609600" y="1872092"/>
-            <a:ext cx="10972800" cy="4666821"/>
-          </a:xfrm>
-        </p:spPr>
-        <p:txBody>
-          <a:bodyPr>
-            <a:normAutofit/>
-          </a:bodyPr>
-          <a:lstStyle/>
-          <a:p>
-            <a:r>
-              <a:rPr lang="en-US" dirty="0"/>
-              <a:t>Basics of DNA/RNA sequencing</a:t>
-            </a:r>
-          </a:p>
-          <a:p>
-            <a:r>
-              <a:rPr lang="en-US" dirty="0"/>
-              <a:t>Alignment of DNA/RNA/AA sequences, suffix arrays, BW transform, Smith-Waterman alignment</a:t>
-            </a:r>
-          </a:p>
-          <a:p>
-            <a:r>
-              <a:rPr lang="en-US" dirty="0"/>
-              <a:t>Assembly methods of DNA/RNA sequencing data and corresponding data structures: k-mer and overlap graphs</a:t>
-            </a:r>
-          </a:p>
-          <a:p>
-            <a:r>
-              <a:rPr lang="en-US" dirty="0"/>
-              <a:t>Evaluation of assemblies</a:t>
-            </a:r>
-          </a:p>
-          <a:p>
-            <a:r>
-              <a:rPr lang="en-US" dirty="0"/>
-              <a:t>Making sense of the genomic sequence -- introduction to genome annotation, use of deep learning in genome annotation</a:t>
-            </a:r>
-          </a:p>
-          <a:p>
-            <a:endParaRPr lang="en-US" dirty="0"/>
-          </a:p>
-        </p:txBody>
-      </p:sp>
-      <p:sp>
-        <p:nvSpPr>
-          <p:cNvPr id="4" name="Slide Number Placeholder 3">
-            <a:extLst>
-              <a:ext uri="{FF2B5EF4-FFF2-40B4-BE49-F238E27FC236}">
-                <a16:creationId xmlns:a16="http://schemas.microsoft.com/office/drawing/2014/main" id="{AE15C277-C6A4-E5B7-63B3-0BC8B74D377D}"/>
-              </a:ext>
-            </a:extLst>
-          </p:cNvPr>
-          <p:cNvSpPr>
-            <a:spLocks noGrp="1"/>
-          </p:cNvSpPr>
-          <p:nvPr>
-            <p:ph type="sldNum" sz="quarter" idx="12"/>
-          </p:nvPr>
-        </p:nvSpPr>
-        <p:spPr/>
-        <p:txBody>
-          <a:bodyPr/>
-          <a:lstStyle/>
-          <a:p>
-            <a:fld id="{B82CCC60-E8CD-4174-8B1A-7DF615B22EEF}" type="slidenum">
-              <a:rPr lang="en-US" smtClean="0"/>
-              <a:pPr/>
-              <a:t>6</a:t>
-            </a:fld>
-            <a:endParaRPr lang="en-US"/>
-          </a:p>
-        </p:txBody>
-      </p:sp>
-    </p:spTree>
-    <p:extLst>
-      <p:ext uri="{BB962C8B-B14F-4D97-AF65-F5344CB8AC3E}">
-        <p14:creationId xmlns:p14="http://schemas.microsoft.com/office/powerpoint/2010/main" val="3431220297"/>
-      </p:ext>
-    </p:extLst>
-  </p:cSld>
-  <p:clrMapOvr>
-    <a:masterClrMapping/>
-  </p:clrMapOvr>
-</p:sld>
-</file>
-
-<file path=ppt/slides/slide60.xml><?xml version="1.0" encoding="utf-8"?>
+<file path=ppt/slides/slide61.xml><?xml version="1.0" encoding="utf-8"?>
 <p:sld xmlns:a="http://schemas.openxmlformats.org/drawingml/2006/main" xmlns:r="http://schemas.openxmlformats.org/officeDocument/2006/relationships" xmlns:p="http://schemas.openxmlformats.org/presentationml/2006/main">
   <p:cSld>
     <p:spTree>
@@ -30548,7 +30711,7 @@
             <a:fld id="{B82CCC60-E8CD-4174-8B1A-7DF615B22EEF}" type="slidenum">
               <a:rPr lang="en-US" smtClean="0"/>
               <a:pPr/>
-              <a:t>60</a:t>
+              <a:t>61</a:t>
             </a:fld>
             <a:endParaRPr lang="en-US"/>
           </a:p>
@@ -30823,7 +30986,7 @@
 </p:sld>
 </file>
 
-<file path=ppt/slides/slide61.xml><?xml version="1.0" encoding="utf-8"?>
+<file path=ppt/slides/slide62.xml><?xml version="1.0" encoding="utf-8"?>
 <p:sld xmlns:a="http://schemas.openxmlformats.org/drawingml/2006/main" xmlns:r="http://schemas.openxmlformats.org/officeDocument/2006/relationships" xmlns:p="http://schemas.openxmlformats.org/presentationml/2006/main">
   <p:cSld>
     <p:spTree>
@@ -31400,7 +31563,7 @@
             <a:fld id="{B82CCC60-E8CD-4174-8B1A-7DF615B22EEF}" type="slidenum">
               <a:rPr lang="en-US" smtClean="0"/>
               <a:pPr/>
-              <a:t>61</a:t>
+              <a:t>62</a:t>
             </a:fld>
             <a:endParaRPr lang="en-US"/>
           </a:p>
@@ -31675,7 +31838,7 @@
 </p:sld>
 </file>
 
-<file path=ppt/slides/slide62.xml><?xml version="1.0" encoding="utf-8"?>
+<file path=ppt/slides/slide63.xml><?xml version="1.0" encoding="utf-8"?>
 <p:sld xmlns:a="http://schemas.openxmlformats.org/drawingml/2006/main" xmlns:r="http://schemas.openxmlformats.org/officeDocument/2006/relationships" xmlns:p="http://schemas.openxmlformats.org/presentationml/2006/main">
   <p:cSld>
     <p:spTree>
@@ -31758,7 +31921,7 @@
             <a:fld id="{B82CCC60-E8CD-4174-8B1A-7DF615B22EEF}" type="slidenum">
               <a:rPr lang="en-US" smtClean="0"/>
               <a:pPr/>
-              <a:t>62</a:t>
+              <a:t>63</a:t>
             </a:fld>
             <a:endParaRPr lang="en-US"/>
           </a:p>
@@ -32091,7 +32254,7 @@
 </p:sld>
 </file>
 
-<file path=ppt/slides/slide63.xml><?xml version="1.0" encoding="utf-8"?>
+<file path=ppt/slides/slide64.xml><?xml version="1.0" encoding="utf-8"?>
 <p:sld xmlns:a="http://schemas.openxmlformats.org/drawingml/2006/main" xmlns:r="http://schemas.openxmlformats.org/officeDocument/2006/relationships" xmlns:p="http://schemas.openxmlformats.org/presentationml/2006/main">
   <p:cSld>
     <p:spTree>
@@ -32144,8 +32307,8 @@
           </a:p>
         </p:txBody>
       </p:sp>
-      <mc:AlternateContent xmlns:mc="http://schemas.openxmlformats.org/markup-compatibility/2006" xmlns:a14="http://schemas.microsoft.com/office/drawing/2010/main">
-        <mc:Choice Requires="a14">
+      <mc:AlternateContent xmlns:mc="http://schemas.openxmlformats.org/markup-compatibility/2006">
+        <mc:Choice xmlns:a14="http://schemas.microsoft.com/office/drawing/2010/main" Requires="a14">
           <p:sp>
             <p:nvSpPr>
               <p:cNvPr id="3" name="Content Placeholder 2">
@@ -32409,7 +32572,7 @@
                     <m:f>
                       <m:fPr>
                         <m:ctrlPr>
-                          <a:rPr lang="en-US" b="0" i="1" smtClean="0">
+                          <a:rPr lang="en-US" i="1" smtClean="0">
                             <a:latin typeface="Cambria Math" panose="02040503050406030204" pitchFamily="18" charset="0"/>
                           </a:rPr>
                         </m:ctrlPr>
@@ -32938,7 +33101,7 @@
             </p:txBody>
           </p:sp>
         </mc:Choice>
-        <mc:Fallback xmlns="">
+        <mc:Fallback>
           <p:sp>
             <p:nvSpPr>
               <p:cNvPr id="3" name="Content Placeholder 2">
@@ -33006,7 +33169,7 @@
             <a:fld id="{B82CCC60-E8CD-4174-8B1A-7DF615B22EEF}" type="slidenum">
               <a:rPr lang="en-US" smtClean="0"/>
               <a:pPr/>
-              <a:t>63</a:t>
+              <a:t>64</a:t>
             </a:fld>
             <a:endParaRPr lang="en-US"/>
           </a:p>
